--- a/Meeting_22/Case_B/Problem_Description.pptx
+++ b/Meeting_22/Case_B/Problem_Description.pptx
@@ -261,7 +261,7 @@
           <a:p>
             <a:fld id="{B0015E7F-2F52-49A1-8D36-36CE4FDACA4B}" type="datetimeFigureOut">
               <a:rPr lang="en-IN" smtClean="0"/>
-              <a:t>09-09-2026</a:t>
+              <a:t>27-09-2026</a:t>
             </a:fld>
             <a:endParaRPr lang="en-IN"/>
           </a:p>
@@ -461,7 +461,7 @@
           <a:p>
             <a:fld id="{B0015E7F-2F52-49A1-8D36-36CE4FDACA4B}" type="datetimeFigureOut">
               <a:rPr lang="en-IN" smtClean="0"/>
-              <a:t>09-09-2026</a:t>
+              <a:t>27-09-2026</a:t>
             </a:fld>
             <a:endParaRPr lang="en-IN"/>
           </a:p>
@@ -671,7 +671,7 @@
           <a:p>
             <a:fld id="{B0015E7F-2F52-49A1-8D36-36CE4FDACA4B}" type="datetimeFigureOut">
               <a:rPr lang="en-IN" smtClean="0"/>
-              <a:t>09-09-2026</a:t>
+              <a:t>27-09-2026</a:t>
             </a:fld>
             <a:endParaRPr lang="en-IN"/>
           </a:p>
@@ -871,7 +871,7 @@
           <a:p>
             <a:fld id="{B0015E7F-2F52-49A1-8D36-36CE4FDACA4B}" type="datetimeFigureOut">
               <a:rPr lang="en-IN" smtClean="0"/>
-              <a:t>09-09-2026</a:t>
+              <a:t>27-09-2026</a:t>
             </a:fld>
             <a:endParaRPr lang="en-IN"/>
           </a:p>
@@ -1147,7 +1147,7 @@
           <a:p>
             <a:fld id="{B0015E7F-2F52-49A1-8D36-36CE4FDACA4B}" type="datetimeFigureOut">
               <a:rPr lang="en-IN" smtClean="0"/>
-              <a:t>09-09-2026</a:t>
+              <a:t>27-09-2026</a:t>
             </a:fld>
             <a:endParaRPr lang="en-IN"/>
           </a:p>
@@ -1415,7 +1415,7 @@
           <a:p>
             <a:fld id="{B0015E7F-2F52-49A1-8D36-36CE4FDACA4B}" type="datetimeFigureOut">
               <a:rPr lang="en-IN" smtClean="0"/>
-              <a:t>09-09-2026</a:t>
+              <a:t>27-09-2026</a:t>
             </a:fld>
             <a:endParaRPr lang="en-IN"/>
           </a:p>
@@ -1830,7 +1830,7 @@
           <a:p>
             <a:fld id="{B0015E7F-2F52-49A1-8D36-36CE4FDACA4B}" type="datetimeFigureOut">
               <a:rPr lang="en-IN" smtClean="0"/>
-              <a:t>09-09-2026</a:t>
+              <a:t>27-09-2026</a:t>
             </a:fld>
             <a:endParaRPr lang="en-IN"/>
           </a:p>
@@ -1972,7 +1972,7 @@
           <a:p>
             <a:fld id="{B0015E7F-2F52-49A1-8D36-36CE4FDACA4B}" type="datetimeFigureOut">
               <a:rPr lang="en-IN" smtClean="0"/>
-              <a:t>09-09-2026</a:t>
+              <a:t>27-09-2026</a:t>
             </a:fld>
             <a:endParaRPr lang="en-IN"/>
           </a:p>
@@ -2085,7 +2085,7 @@
           <a:p>
             <a:fld id="{B0015E7F-2F52-49A1-8D36-36CE4FDACA4B}" type="datetimeFigureOut">
               <a:rPr lang="en-IN" smtClean="0"/>
-              <a:t>09-09-2026</a:t>
+              <a:t>27-09-2026</a:t>
             </a:fld>
             <a:endParaRPr lang="en-IN"/>
           </a:p>
@@ -2398,7 +2398,7 @@
           <a:p>
             <a:fld id="{B0015E7F-2F52-49A1-8D36-36CE4FDACA4B}" type="datetimeFigureOut">
               <a:rPr lang="en-IN" smtClean="0"/>
-              <a:t>09-09-2026</a:t>
+              <a:t>27-09-2026</a:t>
             </a:fld>
             <a:endParaRPr lang="en-IN"/>
           </a:p>
@@ -2687,7 +2687,7 @@
           <a:p>
             <a:fld id="{B0015E7F-2F52-49A1-8D36-36CE4FDACA4B}" type="datetimeFigureOut">
               <a:rPr lang="en-IN" smtClean="0"/>
-              <a:t>09-09-2026</a:t>
+              <a:t>27-09-2026</a:t>
             </a:fld>
             <a:endParaRPr lang="en-IN"/>
           </a:p>
@@ -2930,7 +2930,7 @@
           <a:p>
             <a:fld id="{B0015E7F-2F52-49A1-8D36-36CE4FDACA4B}" type="datetimeFigureOut">
               <a:rPr lang="en-IN" smtClean="0"/>
-              <a:t>09-09-2026</a:t>
+              <a:t>27-09-2026</a:t>
             </a:fld>
             <a:endParaRPr lang="en-IN"/>
           </a:p>
@@ -3361,7 +3361,7 @@
         </p:nvSpPr>
         <p:spPr>
           <a:xfrm>
-            <a:off x="3165987" y="668593"/>
+            <a:off x="3209949" y="843749"/>
             <a:ext cx="5400000" cy="5400000"/>
           </a:xfrm>
           <a:prstGeom prst="rect">
@@ -3410,7 +3410,7 @@
         </p:nvSpPr>
         <p:spPr>
           <a:xfrm>
-            <a:off x="5775987" y="5348593"/>
+            <a:off x="5819949" y="5523749"/>
             <a:ext cx="180000" cy="720000"/>
           </a:xfrm>
           <a:prstGeom prst="rect">
@@ -3457,7 +3457,7 @@
         </p:nvSpPr>
         <p:spPr>
           <a:xfrm>
-            <a:off x="5775987" y="674476"/>
+            <a:off x="5819949" y="849632"/>
             <a:ext cx="180000" cy="720000"/>
           </a:xfrm>
           <a:prstGeom prst="rect">
@@ -3504,7 +3504,7 @@
         </p:nvSpPr>
         <p:spPr>
           <a:xfrm>
-            <a:off x="5768245" y="2114476"/>
+            <a:off x="5812207" y="2289632"/>
             <a:ext cx="180000" cy="2514117"/>
           </a:xfrm>
           <a:prstGeom prst="rect">
@@ -3553,7 +3553,7 @@
         </p:nvCxnSpPr>
         <p:spPr>
           <a:xfrm>
-            <a:off x="8271020" y="808334"/>
+            <a:off x="8314982" y="983490"/>
             <a:ext cx="609600" cy="0"/>
           </a:xfrm>
           <a:prstGeom prst="straightConnector1">
@@ -3597,7 +3597,7 @@
         </p:nvCxnSpPr>
         <p:spPr>
           <a:xfrm>
-            <a:off x="8271020" y="1127882"/>
+            <a:off x="8314982" y="1303038"/>
             <a:ext cx="609600" cy="0"/>
           </a:xfrm>
           <a:prstGeom prst="straightConnector1">
@@ -3641,7 +3641,7 @@
         </p:nvCxnSpPr>
         <p:spPr>
           <a:xfrm>
-            <a:off x="8271020" y="1447430"/>
+            <a:off x="8314982" y="1622586"/>
             <a:ext cx="609600" cy="0"/>
           </a:xfrm>
           <a:prstGeom prst="straightConnector1">
@@ -3685,7 +3685,7 @@
         </p:nvCxnSpPr>
         <p:spPr>
           <a:xfrm>
-            <a:off x="8271020" y="1766978"/>
+            <a:off x="8314982" y="1942134"/>
             <a:ext cx="609600" cy="0"/>
           </a:xfrm>
           <a:prstGeom prst="straightConnector1">
@@ -3729,7 +3729,7 @@
         </p:nvCxnSpPr>
         <p:spPr>
           <a:xfrm>
-            <a:off x="8271020" y="2086526"/>
+            <a:off x="8314982" y="2261682"/>
             <a:ext cx="609600" cy="0"/>
           </a:xfrm>
           <a:prstGeom prst="straightConnector1">
@@ -3773,7 +3773,7 @@
         </p:nvCxnSpPr>
         <p:spPr>
           <a:xfrm>
-            <a:off x="8271020" y="2406074"/>
+            <a:off x="8314982" y="2581230"/>
             <a:ext cx="609600" cy="0"/>
           </a:xfrm>
           <a:prstGeom prst="straightConnector1">
@@ -3817,7 +3817,7 @@
         </p:nvCxnSpPr>
         <p:spPr>
           <a:xfrm>
-            <a:off x="8271020" y="2725622"/>
+            <a:off x="8314982" y="2900778"/>
             <a:ext cx="609600" cy="0"/>
           </a:xfrm>
           <a:prstGeom prst="straightConnector1">
@@ -3861,7 +3861,7 @@
         </p:nvCxnSpPr>
         <p:spPr>
           <a:xfrm>
-            <a:off x="8271020" y="3045170"/>
+            <a:off x="8314982" y="3220326"/>
             <a:ext cx="609600" cy="0"/>
           </a:xfrm>
           <a:prstGeom prst="straightConnector1">
@@ -3905,7 +3905,7 @@
         </p:nvCxnSpPr>
         <p:spPr>
           <a:xfrm>
-            <a:off x="8271020" y="3364718"/>
+            <a:off x="8314982" y="3539874"/>
             <a:ext cx="609600" cy="0"/>
           </a:xfrm>
           <a:prstGeom prst="straightConnector1">
@@ -3949,7 +3949,7 @@
         </p:nvCxnSpPr>
         <p:spPr>
           <a:xfrm>
-            <a:off x="8271020" y="3684266"/>
+            <a:off x="8314982" y="3859422"/>
             <a:ext cx="609600" cy="0"/>
           </a:xfrm>
           <a:prstGeom prst="straightConnector1">
@@ -3993,7 +3993,7 @@
         </p:nvCxnSpPr>
         <p:spPr>
           <a:xfrm>
-            <a:off x="8271020" y="4003814"/>
+            <a:off x="8314982" y="4178970"/>
             <a:ext cx="609600" cy="0"/>
           </a:xfrm>
           <a:prstGeom prst="straightConnector1">
@@ -4037,7 +4037,7 @@
         </p:nvCxnSpPr>
         <p:spPr>
           <a:xfrm>
-            <a:off x="8271020" y="4323362"/>
+            <a:off x="8314982" y="4498518"/>
             <a:ext cx="609600" cy="0"/>
           </a:xfrm>
           <a:prstGeom prst="straightConnector1">
@@ -4081,7 +4081,7 @@
         </p:nvCxnSpPr>
         <p:spPr>
           <a:xfrm>
-            <a:off x="8271020" y="4642910"/>
+            <a:off x="8314982" y="4818066"/>
             <a:ext cx="609600" cy="0"/>
           </a:xfrm>
           <a:prstGeom prst="straightConnector1">
@@ -4125,7 +4125,7 @@
         </p:nvCxnSpPr>
         <p:spPr>
           <a:xfrm>
-            <a:off x="8271020" y="4962458"/>
+            <a:off x="8314982" y="5137614"/>
             <a:ext cx="609600" cy="0"/>
           </a:xfrm>
           <a:prstGeom prst="straightConnector1">
@@ -4169,7 +4169,7 @@
         </p:nvCxnSpPr>
         <p:spPr>
           <a:xfrm>
-            <a:off x="8271020" y="5282006"/>
+            <a:off x="8314982" y="5457162"/>
             <a:ext cx="609600" cy="0"/>
           </a:xfrm>
           <a:prstGeom prst="straightConnector1">
@@ -4213,7 +4213,7 @@
         </p:nvCxnSpPr>
         <p:spPr>
           <a:xfrm>
-            <a:off x="8271020" y="5601554"/>
+            <a:off x="8314982" y="5776710"/>
             <a:ext cx="609600" cy="0"/>
           </a:xfrm>
           <a:prstGeom prst="straightConnector1">
@@ -4257,7 +4257,7 @@
         </p:nvCxnSpPr>
         <p:spPr>
           <a:xfrm>
-            <a:off x="8271020" y="5921102"/>
+            <a:off x="8314982" y="6096258"/>
             <a:ext cx="609600" cy="0"/>
           </a:xfrm>
           <a:prstGeom prst="straightConnector1">
@@ -4301,7 +4301,7 @@
         </p:nvCxnSpPr>
         <p:spPr>
           <a:xfrm flipH="1">
-            <a:off x="2861187" y="817428"/>
+            <a:off x="2905149" y="992584"/>
             <a:ext cx="609600" cy="0"/>
           </a:xfrm>
           <a:prstGeom prst="straightConnector1">
@@ -4345,7 +4345,7 @@
         </p:nvCxnSpPr>
         <p:spPr>
           <a:xfrm flipH="1">
-            <a:off x="2861187" y="1136976"/>
+            <a:off x="2905149" y="1312132"/>
             <a:ext cx="609600" cy="0"/>
           </a:xfrm>
           <a:prstGeom prst="straightConnector1">
@@ -4389,7 +4389,7 @@
         </p:nvCxnSpPr>
         <p:spPr>
           <a:xfrm flipH="1">
-            <a:off x="2861187" y="1456524"/>
+            <a:off x="2905149" y="1631680"/>
             <a:ext cx="609600" cy="0"/>
           </a:xfrm>
           <a:prstGeom prst="straightConnector1">
@@ -4433,7 +4433,7 @@
         </p:nvCxnSpPr>
         <p:spPr>
           <a:xfrm flipH="1">
-            <a:off x="2861187" y="1776072"/>
+            <a:off x="2905149" y="1951228"/>
             <a:ext cx="609600" cy="0"/>
           </a:xfrm>
           <a:prstGeom prst="straightConnector1">
@@ -4477,7 +4477,7 @@
         </p:nvCxnSpPr>
         <p:spPr>
           <a:xfrm flipH="1">
-            <a:off x="2861187" y="2095620"/>
+            <a:off x="2905149" y="2270776"/>
             <a:ext cx="609600" cy="0"/>
           </a:xfrm>
           <a:prstGeom prst="straightConnector1">
@@ -4521,7 +4521,7 @@
         </p:nvCxnSpPr>
         <p:spPr>
           <a:xfrm flipH="1">
-            <a:off x="2861187" y="2415168"/>
+            <a:off x="2905149" y="2590324"/>
             <a:ext cx="609600" cy="0"/>
           </a:xfrm>
           <a:prstGeom prst="straightConnector1">
@@ -4565,7 +4565,7 @@
         </p:nvCxnSpPr>
         <p:spPr>
           <a:xfrm flipH="1">
-            <a:off x="2861187" y="2734716"/>
+            <a:off x="2905149" y="2909872"/>
             <a:ext cx="609600" cy="0"/>
           </a:xfrm>
           <a:prstGeom prst="straightConnector1">
@@ -4609,7 +4609,7 @@
         </p:nvCxnSpPr>
         <p:spPr>
           <a:xfrm flipH="1">
-            <a:off x="2861187" y="3054264"/>
+            <a:off x="2905149" y="3229420"/>
             <a:ext cx="609600" cy="0"/>
           </a:xfrm>
           <a:prstGeom prst="straightConnector1">
@@ -4653,7 +4653,7 @@
         </p:nvCxnSpPr>
         <p:spPr>
           <a:xfrm flipH="1">
-            <a:off x="2861187" y="3373812"/>
+            <a:off x="2905149" y="3548968"/>
             <a:ext cx="609600" cy="0"/>
           </a:xfrm>
           <a:prstGeom prst="straightConnector1">
@@ -4697,7 +4697,7 @@
         </p:nvCxnSpPr>
         <p:spPr>
           <a:xfrm flipH="1">
-            <a:off x="2861187" y="3693360"/>
+            <a:off x="2905149" y="3868516"/>
             <a:ext cx="609600" cy="0"/>
           </a:xfrm>
           <a:prstGeom prst="straightConnector1">
@@ -4741,7 +4741,7 @@
         </p:nvCxnSpPr>
         <p:spPr>
           <a:xfrm flipH="1">
-            <a:off x="2861187" y="4012908"/>
+            <a:off x="2905149" y="4188064"/>
             <a:ext cx="609600" cy="0"/>
           </a:xfrm>
           <a:prstGeom prst="straightConnector1">
@@ -4785,7 +4785,7 @@
         </p:nvCxnSpPr>
         <p:spPr>
           <a:xfrm flipH="1">
-            <a:off x="2861187" y="4332456"/>
+            <a:off x="2905149" y="4507612"/>
             <a:ext cx="609600" cy="0"/>
           </a:xfrm>
           <a:prstGeom prst="straightConnector1">
@@ -4829,7 +4829,7 @@
         </p:nvCxnSpPr>
         <p:spPr>
           <a:xfrm flipH="1">
-            <a:off x="2861187" y="4652004"/>
+            <a:off x="2905149" y="4827160"/>
             <a:ext cx="609600" cy="0"/>
           </a:xfrm>
           <a:prstGeom prst="straightConnector1">
@@ -4873,7 +4873,7 @@
         </p:nvCxnSpPr>
         <p:spPr>
           <a:xfrm flipH="1">
-            <a:off x="2861187" y="4971552"/>
+            <a:off x="2905149" y="5146708"/>
             <a:ext cx="609600" cy="0"/>
           </a:xfrm>
           <a:prstGeom prst="straightConnector1">
@@ -4917,7 +4917,7 @@
         </p:nvCxnSpPr>
         <p:spPr>
           <a:xfrm flipH="1">
-            <a:off x="2861187" y="5291100"/>
+            <a:off x="2905149" y="5466256"/>
             <a:ext cx="609600" cy="0"/>
           </a:xfrm>
           <a:prstGeom prst="straightConnector1">
@@ -4961,7 +4961,7 @@
         </p:nvCxnSpPr>
         <p:spPr>
           <a:xfrm flipH="1">
-            <a:off x="2861187" y="5610648"/>
+            <a:off x="2905149" y="5785804"/>
             <a:ext cx="609600" cy="0"/>
           </a:xfrm>
           <a:prstGeom prst="straightConnector1">
@@ -5005,7 +5005,7 @@
         </p:nvCxnSpPr>
         <p:spPr>
           <a:xfrm flipH="1">
-            <a:off x="2861187" y="5930196"/>
+            <a:off x="2905149" y="6105352"/>
             <a:ext cx="609600" cy="0"/>
           </a:xfrm>
           <a:prstGeom prst="straightConnector1">
@@ -5047,7 +5047,7 @@
         </p:nvSpPr>
         <p:spPr>
           <a:xfrm>
-            <a:off x="5955987" y="657337"/>
+            <a:off x="5999949" y="832493"/>
             <a:ext cx="781664" cy="5400000"/>
           </a:xfrm>
           <a:prstGeom prst="rect">
@@ -5101,7 +5101,7 @@
         </p:nvSpPr>
         <p:spPr>
           <a:xfrm>
-            <a:off x="4975405" y="668593"/>
+            <a:off x="5028086" y="843749"/>
             <a:ext cx="781664" cy="5399999"/>
           </a:xfrm>
           <a:prstGeom prst="rect">
@@ -5157,7 +5157,7 @@
         </p:nvCxnSpPr>
         <p:spPr>
           <a:xfrm>
-            <a:off x="6100915" y="2114476"/>
+            <a:off x="6144877" y="2289632"/>
             <a:ext cx="0" cy="2520000"/>
           </a:xfrm>
           <a:prstGeom prst="straightConnector1">
@@ -5199,7 +5199,7 @@
         </p:nvCxnSpPr>
         <p:spPr>
           <a:xfrm>
-            <a:off x="6086167" y="1394476"/>
+            <a:off x="6130129" y="1569632"/>
             <a:ext cx="0" cy="720000"/>
           </a:xfrm>
           <a:prstGeom prst="straightConnector1">
@@ -5241,7 +5241,7 @@
         </p:nvCxnSpPr>
         <p:spPr>
           <a:xfrm>
-            <a:off x="6086167" y="671534"/>
+            <a:off x="6130129" y="846690"/>
             <a:ext cx="0" cy="725883"/>
           </a:xfrm>
           <a:prstGeom prst="straightConnector1">
@@ -5283,7 +5283,7 @@
         </p:nvCxnSpPr>
         <p:spPr>
           <a:xfrm>
-            <a:off x="6100916" y="4628593"/>
+            <a:off x="6144878" y="4803749"/>
             <a:ext cx="0" cy="720000"/>
           </a:xfrm>
           <a:prstGeom prst="straightConnector1">
@@ -5325,7 +5325,7 @@
         </p:nvCxnSpPr>
         <p:spPr>
           <a:xfrm>
-            <a:off x="6096000" y="5348593"/>
+            <a:off x="6139962" y="5523749"/>
             <a:ext cx="0" cy="720000"/>
           </a:xfrm>
           <a:prstGeom prst="straightConnector1">
@@ -5367,50 +5367,8 @@
         </p:nvCxnSpPr>
         <p:spPr>
           <a:xfrm>
-            <a:off x="5955987" y="564658"/>
+            <a:off x="5999949" y="739814"/>
             <a:ext cx="789406" cy="0"/>
-          </a:xfrm>
-          <a:prstGeom prst="straightConnector1">
-            <a:avLst/>
-          </a:prstGeom>
-          <a:ln w="12700">
-            <a:headEnd type="triangle"/>
-            <a:tailEnd type="triangle"/>
-          </a:ln>
-        </p:spPr>
-        <p:style>
-          <a:lnRef idx="1">
-            <a:schemeClr val="dk1"/>
-          </a:lnRef>
-          <a:fillRef idx="0">
-            <a:schemeClr val="dk1"/>
-          </a:fillRef>
-          <a:effectRef idx="0">
-            <a:schemeClr val="dk1"/>
-          </a:effectRef>
-          <a:fontRef idx="minor">
-            <a:schemeClr val="tx1"/>
-          </a:fontRef>
-        </p:style>
-      </p:cxnSp>
-      <p:cxnSp>
-        <p:nvCxnSpPr>
-          <p:cNvPr id="74" name="Straight Arrow Connector 73">
-            <a:extLst>
-              <a:ext uri="{FF2B5EF4-FFF2-40B4-BE49-F238E27FC236}">
-                <a16:creationId xmlns:a16="http://schemas.microsoft.com/office/drawing/2014/main" id="{8E65A59F-94E3-451F-5ADD-9C30ADF9DAC2}"/>
-              </a:ext>
-            </a:extLst>
-          </p:cNvPr>
-          <p:cNvCxnSpPr>
-            <a:cxnSpLocks/>
-          </p:cNvCxnSpPr>
-          <p:nvPr/>
-        </p:nvCxnSpPr>
-        <p:spPr>
-          <a:xfrm>
-            <a:off x="5948245" y="256106"/>
-            <a:ext cx="2610000" cy="0"/>
           </a:xfrm>
           <a:prstGeom prst="straightConnector1">
             <a:avLst/>
@@ -5451,50 +5409,8 @@
         </p:nvCxnSpPr>
         <p:spPr>
           <a:xfrm flipV="1">
-            <a:off x="2728915" y="636696"/>
+            <a:off x="2772877" y="811852"/>
             <a:ext cx="0" cy="5374650"/>
-          </a:xfrm>
-          <a:prstGeom prst="straightConnector1">
-            <a:avLst/>
-          </a:prstGeom>
-          <a:ln w="12700">
-            <a:headEnd type="triangle"/>
-            <a:tailEnd type="triangle"/>
-          </a:ln>
-        </p:spPr>
-        <p:style>
-          <a:lnRef idx="1">
-            <a:schemeClr val="dk1"/>
-          </a:lnRef>
-          <a:fillRef idx="0">
-            <a:schemeClr val="dk1"/>
-          </a:fillRef>
-          <a:effectRef idx="0">
-            <a:schemeClr val="dk1"/>
-          </a:effectRef>
-          <a:fontRef idx="minor">
-            <a:schemeClr val="tx1"/>
-          </a:fontRef>
-        </p:style>
-      </p:cxnSp>
-      <p:cxnSp>
-        <p:nvCxnSpPr>
-          <p:cNvPr id="85" name="Straight Arrow Connector 84">
-            <a:extLst>
-              <a:ext uri="{FF2B5EF4-FFF2-40B4-BE49-F238E27FC236}">
-                <a16:creationId xmlns:a16="http://schemas.microsoft.com/office/drawing/2014/main" id="{553F3545-2951-FA3E-6842-F4D261255557}"/>
-              </a:ext>
-            </a:extLst>
-          </p:cNvPr>
-          <p:cNvCxnSpPr>
-            <a:cxnSpLocks/>
-          </p:cNvCxnSpPr>
-          <p:nvPr/>
-        </p:nvCxnSpPr>
-        <p:spPr>
-          <a:xfrm>
-            <a:off x="3165987" y="256106"/>
-            <a:ext cx="2610000" cy="0"/>
           </a:xfrm>
           <a:prstGeom prst="straightConnector1">
             <a:avLst/>
@@ -5535,7 +5451,7 @@
         </p:nvCxnSpPr>
         <p:spPr>
           <a:xfrm>
-            <a:off x="4986581" y="564658"/>
+            <a:off x="5030543" y="739814"/>
             <a:ext cx="789406" cy="0"/>
           </a:xfrm>
           <a:prstGeom prst="straightConnector1">
@@ -5575,7 +5491,7 @@
         </p:nvCxnSpPr>
         <p:spPr>
           <a:xfrm>
-            <a:off x="6587613" y="6011346"/>
+            <a:off x="6631575" y="6186502"/>
             <a:ext cx="393290" cy="369790"/>
           </a:xfrm>
           <a:prstGeom prst="straightConnector1">
@@ -5616,7 +5532,7 @@
         </p:nvCxnSpPr>
         <p:spPr>
           <a:xfrm flipH="1">
-            <a:off x="4653331" y="5946040"/>
+            <a:off x="4697293" y="6121196"/>
             <a:ext cx="433848" cy="445973"/>
           </a:xfrm>
           <a:prstGeom prst="straightConnector1">
@@ -5657,7 +5573,7 @@
         </p:nvCxnSpPr>
         <p:spPr>
           <a:xfrm>
-            <a:off x="5765788" y="6161112"/>
+            <a:off x="5809750" y="6336268"/>
             <a:ext cx="180000" cy="0"/>
           </a:xfrm>
           <a:prstGeom prst="straightConnector1">
@@ -5697,7 +5613,7 @@
         </p:nvSpPr>
         <p:spPr>
           <a:xfrm>
-            <a:off x="6016440" y="272056"/>
+            <a:off x="6060402" y="447212"/>
             <a:ext cx="486030" cy="369332"/>
           </a:xfrm>
           <a:prstGeom prst="rect">
@@ -5713,7 +5629,7 @@
           <a:p>
             <a:r>
               <a:rPr lang="en-US" dirty="0"/>
-              <a:t>3m</a:t>
+              <a:t>2m</a:t>
             </a:r>
             <a:endParaRPr lang="en-IN" dirty="0"/>
           </a:p>
@@ -5733,7 +5649,7 @@
         </p:nvSpPr>
         <p:spPr>
           <a:xfrm>
-            <a:off x="6045294" y="886390"/>
+            <a:off x="6089256" y="1061546"/>
             <a:ext cx="399468" cy="369332"/>
           </a:xfrm>
           <a:prstGeom prst="rect">
@@ -5769,7 +5685,7 @@
         </p:nvSpPr>
         <p:spPr>
           <a:xfrm>
-            <a:off x="2118492" y="3035338"/>
+            <a:off x="5636089" y="93483"/>
             <a:ext cx="603050" cy="369332"/>
           </a:xfrm>
           <a:prstGeom prst="rect">
@@ -5805,7 +5721,7 @@
         </p:nvSpPr>
         <p:spPr>
           <a:xfrm>
-            <a:off x="6045294" y="1560477"/>
+            <a:off x="6089256" y="1735633"/>
             <a:ext cx="327334" cy="369332"/>
           </a:xfrm>
           <a:prstGeom prst="rect">
@@ -5841,7 +5757,7 @@
         </p:nvSpPr>
         <p:spPr>
           <a:xfrm>
-            <a:off x="6045294" y="3086790"/>
+            <a:off x="6089256" y="3261946"/>
             <a:ext cx="399468" cy="369332"/>
           </a:xfrm>
           <a:prstGeom prst="rect">
@@ -5877,7 +5793,7 @@
         </p:nvSpPr>
         <p:spPr>
           <a:xfrm>
-            <a:off x="6045294" y="4767960"/>
+            <a:off x="6089256" y="4943116"/>
             <a:ext cx="327334" cy="369332"/>
           </a:xfrm>
           <a:prstGeom prst="rect">
@@ -5913,7 +5829,7 @@
         </p:nvSpPr>
         <p:spPr>
           <a:xfrm>
-            <a:off x="6045294" y="5503535"/>
+            <a:off x="6089256" y="5678691"/>
             <a:ext cx="399468" cy="369332"/>
           </a:xfrm>
           <a:prstGeom prst="rect">
@@ -5935,8 +5851,8 @@
           </a:p>
         </p:txBody>
       </p:sp>
-      <mc:AlternateContent xmlns:mc="http://schemas.openxmlformats.org/markup-compatibility/2006" xmlns:a14="http://schemas.microsoft.com/office/drawing/2010/main">
-        <mc:Choice Requires="a14">
+      <mc:AlternateContent xmlns:mc="http://schemas.openxmlformats.org/markup-compatibility/2006">
+        <mc:Choice xmlns:a14="http://schemas.microsoft.com/office/drawing/2010/main" Requires="a14">
           <p:sp>
             <p:nvSpPr>
               <p:cNvPr id="111" name="TextBox 110">
@@ -5951,7 +5867,7 @@
             </p:nvSpPr>
             <p:spPr>
               <a:xfrm>
-                <a:off x="4418705" y="6296413"/>
+                <a:off x="4462667" y="6471569"/>
                 <a:ext cx="380232" cy="369332"/>
               </a:xfrm>
               <a:prstGeom prst="rect">
@@ -5990,7 +5906,7 @@
             </p:txBody>
           </p:sp>
         </mc:Choice>
-        <mc:Fallback xmlns="">
+        <mc:Fallback>
           <p:sp>
             <p:nvSpPr>
               <p:cNvPr id="111" name="TextBox 110">
@@ -6007,7 +5923,7 @@
             </p:nvSpPr>
             <p:spPr>
               <a:xfrm>
-                <a:off x="4418705" y="6296413"/>
+                <a:off x="4462667" y="6471569"/>
                 <a:ext cx="380232" cy="369332"/>
               </a:xfrm>
               <a:prstGeom prst="rect">
@@ -6035,8 +5951,8 @@
           </p:sp>
         </mc:Fallback>
       </mc:AlternateContent>
-      <mc:AlternateContent xmlns:mc="http://schemas.openxmlformats.org/markup-compatibility/2006" xmlns:a14="http://schemas.microsoft.com/office/drawing/2010/main">
-        <mc:Choice Requires="a14">
+      <mc:AlternateContent xmlns:mc="http://schemas.openxmlformats.org/markup-compatibility/2006">
+        <mc:Choice xmlns:a14="http://schemas.microsoft.com/office/drawing/2010/main" Requires="a14">
           <p:sp>
             <p:nvSpPr>
               <p:cNvPr id="112" name="TextBox 111">
@@ -6051,7 +5967,7 @@
             </p:nvSpPr>
             <p:spPr>
               <a:xfrm>
-                <a:off x="6858726" y="6236330"/>
+                <a:off x="6902688" y="6411486"/>
                 <a:ext cx="380232" cy="369332"/>
               </a:xfrm>
               <a:prstGeom prst="rect">
@@ -6090,7 +6006,7 @@
             </p:txBody>
           </p:sp>
         </mc:Choice>
-        <mc:Fallback xmlns="">
+        <mc:Fallback>
           <p:sp>
             <p:nvSpPr>
               <p:cNvPr id="112" name="TextBox 111">
@@ -6107,7 +6023,7 @@
             </p:nvSpPr>
             <p:spPr>
               <a:xfrm>
-                <a:off x="6858726" y="6236330"/>
+                <a:off x="6902688" y="6411486"/>
                 <a:ext cx="380232" cy="369332"/>
               </a:xfrm>
               <a:prstGeom prst="rect">
@@ -6116,7 +6032,7 @@
               <a:blipFill>
                 <a:blip r:embed="rId3"/>
                 <a:stretch>
-                  <a:fillRect b="-6557"/>
+                  <a:fillRect b="-6667"/>
                 </a:stretch>
               </a:blipFill>
             </p:spPr>
@@ -6149,7 +6065,7 @@
         </p:nvSpPr>
         <p:spPr>
           <a:xfrm>
-            <a:off x="5701742" y="6313512"/>
+            <a:off x="5745704" y="6488668"/>
             <a:ext cx="660758" cy="369332"/>
           </a:xfrm>
           <a:prstGeom prst="rect">
@@ -6185,7 +6101,7 @@
         </p:nvSpPr>
         <p:spPr>
           <a:xfrm>
-            <a:off x="5167169" y="257254"/>
+            <a:off x="5211131" y="432410"/>
             <a:ext cx="486030" cy="369332"/>
           </a:xfrm>
           <a:prstGeom prst="rect">
@@ -6201,7 +6117,85 @@
           <a:p>
             <a:r>
               <a:rPr lang="en-US" dirty="0"/>
-              <a:t>3m</a:t>
+              <a:t>2m</a:t>
+            </a:r>
+            <a:endParaRPr lang="en-IN" dirty="0"/>
+          </a:p>
+        </p:txBody>
+      </p:sp>
+      <p:cxnSp>
+        <p:nvCxnSpPr>
+          <p:cNvPr id="2" name="Straight Arrow Connector 1">
+            <a:extLst>
+              <a:ext uri="{FF2B5EF4-FFF2-40B4-BE49-F238E27FC236}">
+                <a16:creationId xmlns:a16="http://schemas.microsoft.com/office/drawing/2014/main" id="{5DE8977C-3CF7-28A5-EDCD-3E08277AE3FA}"/>
+              </a:ext>
+            </a:extLst>
+          </p:cNvPr>
+          <p:cNvCxnSpPr>
+            <a:cxnSpLocks/>
+          </p:cNvCxnSpPr>
+          <p:nvPr/>
+        </p:nvCxnSpPr>
+        <p:spPr>
+          <a:xfrm>
+            <a:off x="3209949" y="432410"/>
+            <a:ext cx="5400000" cy="0"/>
+          </a:xfrm>
+          <a:prstGeom prst="straightConnector1">
+            <a:avLst/>
+          </a:prstGeom>
+          <a:ln w="12700">
+            <a:headEnd type="triangle"/>
+            <a:tailEnd type="triangle"/>
+          </a:ln>
+        </p:spPr>
+        <p:style>
+          <a:lnRef idx="1">
+            <a:schemeClr val="dk1"/>
+          </a:lnRef>
+          <a:fillRef idx="0">
+            <a:schemeClr val="dk1"/>
+          </a:fillRef>
+          <a:effectRef idx="0">
+            <a:schemeClr val="dk1"/>
+          </a:effectRef>
+          <a:fontRef idx="minor">
+            <a:schemeClr val="tx1"/>
+          </a:fontRef>
+        </p:style>
+      </p:cxnSp>
+      <p:sp>
+        <p:nvSpPr>
+          <p:cNvPr id="8" name="TextBox 7">
+            <a:extLst>
+              <a:ext uri="{FF2B5EF4-FFF2-40B4-BE49-F238E27FC236}">
+                <a16:creationId xmlns:a16="http://schemas.microsoft.com/office/drawing/2014/main" id="{FA883086-89EA-39E3-3180-F61284AE3275}"/>
+              </a:ext>
+            </a:extLst>
+          </p:cNvPr>
+          <p:cNvSpPr txBox="1"/>
+          <p:nvPr/>
+        </p:nvSpPr>
+        <p:spPr>
+          <a:xfrm>
+            <a:off x="2180305" y="3188466"/>
+            <a:ext cx="603050" cy="369332"/>
+          </a:xfrm>
+          <a:prstGeom prst="rect">
+            <a:avLst/>
+          </a:prstGeom>
+          <a:noFill/>
+        </p:spPr>
+        <p:txBody>
+          <a:bodyPr wrap="none" rtlCol="0">
+            <a:spAutoFit/>
+          </a:bodyPr>
+          <a:lstStyle/>
+          <a:p>
+            <a:r>
+              <a:rPr lang="en-US" dirty="0"/>
+              <a:t>15m</a:t>
             </a:r>
             <a:endParaRPr lang="en-IN" dirty="0"/>
           </a:p>
